--- a/static/decks/ADNOCDRILL.AE.pptx
+++ b/static/decks/ADNOCDRILL.AE.pptx
@@ -3339,7 +3339,7 @@
                 </a:solidFill>
                 <a:latin typeface="Georgia"/>
               </a:rPr>
-              <a:t>ADNOCDRILL.AE</a:t>
+              <a:t>ADNOC Drilling Company P.J.S.C.</a:t>
             </a:r>
           </a:p>
         </p:txBody>
@@ -3374,7 +3374,7 @@
                 </a:solidFill>
                 <a:latin typeface="Calibri"/>
               </a:rPr>
-              <a:t>ADNOCDRILL.AE  ·  —  ·  —  ·  —</a:t>
+              <a:t>ADNOCDRILL.AE  ·  Energy  ·  Oil &amp; Gas Drilling  ·  —</a:t>
             </a:r>
           </a:p>
         </p:txBody>
@@ -3808,7 +3808,7 @@
                 </a:solidFill>
                 <a:latin typeface="Calibri"/>
               </a:rPr>
-              <a:t>6.47</a:t>
+              <a:t>USD 6.47</a:t>
             </a:r>
           </a:p>
         </p:txBody>
@@ -3968,7 +3968,7 @@
                 </a:solidFill>
                 <a:latin typeface="Calibri"/>
               </a:rPr>
-              <a:t>+1194.0%</a:t>
+              <a:t>+286.5%</a:t>
             </a:r>
           </a:p>
         </p:txBody>
@@ -4117,7 +4117,7 @@
                 </a:solidFill>
                 <a:latin typeface="Calibri"/>
               </a:rPr>
-              <a:t>0.50</a:t>
+              <a:t>USD 1.67</a:t>
             </a:r>
           </a:p>
         </p:txBody>
@@ -4187,7 +4187,7 @@
                 </a:solidFill>
                 <a:latin typeface="Calibri"/>
               </a:rPr>
-              <a:t>—</a:t>
+              <a:t>USD 26.8B</a:t>
             </a:r>
           </a:p>
         </p:txBody>
@@ -4327,7 +4327,7 @@
                 </a:solidFill>
                 <a:latin typeface="Calibri"/>
               </a:rPr>
-              <a:t>—</a:t>
+              <a:t>14.7x</a:t>
             </a:r>
           </a:p>
         </p:txBody>
@@ -4397,7 +4397,7 @@
                 </a:solidFill>
                 <a:latin typeface="Calibri"/>
               </a:rPr>
-              <a:t>—</a:t>
+              <a:t>4.61%</a:t>
             </a:r>
           </a:p>
         </p:txBody>
@@ -4467,7 +4467,7 @@
                 </a:solidFill>
                 <a:latin typeface="Calibri"/>
               </a:rPr>
-              <a:t/>
+              <a:t>USD</a:t>
             </a:r>
           </a:p>
         </p:txBody>
@@ -5080,7 +5080,7 @@
                 </a:solidFill>
                 <a:latin typeface="Calibri"/>
               </a:rPr>
-              <a:t> 0.00</a:t>
+              <a:t>USD 1.51</a:t>
             </a:r>
           </a:p>
         </p:txBody>
@@ -5115,7 +5115,7 @@
                 </a:solidFill>
                 <a:latin typeface="Calibri"/>
               </a:rPr>
-              <a:t> 1.00</a:t>
+              <a:t>USD 1.84</a:t>
             </a:r>
           </a:p>
         </p:txBody>
@@ -5257,7 +5257,7 @@
         </p:nvSpPr>
         <p:spPr>
           <a:xfrm>
-            <a:off x="2788920" y="6565392"/>
+            <a:off x="2788919" y="6565392"/>
             <a:ext cx="1280160" cy="182880"/>
           </a:xfrm>
           <a:prstGeom prst="rect">
@@ -5279,7 +5279,7 @@
                 </a:solidFill>
                 <a:latin typeface="Calibri"/>
               </a:rPr>
-              <a:t>Current   0.50</a:t>
+              <a:t>Current  USD 1.67</a:t>
             </a:r>
           </a:p>
         </p:txBody>
@@ -6002,7 +6002,7 @@
                 </a:solidFill>
                 <a:latin typeface="Calibri"/>
               </a:rPr>
-              <a:t>Source: investing  |  Generated 13 May 2026  |  Analyst: Jabal Research</a:t>
+              <a:t>Source: investing, ishares, marketscreener  |  Generated 13 May 2026  |  Analyst: Jabal Research</a:t>
             </a:r>
           </a:p>
         </p:txBody>
@@ -6548,7 +6548,7 @@
                 </a:solidFill>
                 <a:latin typeface="Calibri"/>
               </a:rPr>
-              <a:t>Jabal maintains a constructive view into the upcoming print. the company sits in the — sector (—). Street consensus is buy (16 analysts covering); consensus target 6.47. The thesis hinges on three factors: demand trajectory through H2, feedstock/input-cost discipline, and management's tone on guidance during the call. We expect the print itself to be within consensus bounds; the read on forward commentary is the swing factor.</a:t>
+              <a:t>Jabal maintains a constructive view into the upcoming print. ADNOC Drilling Company P.J.S.C. sits in the Energy sector (Oil &amp; Gas Drilling). Street consensus is buy (16 analysts covering); consensus target 6.47. The shares trade at a P/E around 14.7x trailing earnings. The macro and commodity backdrop is anchored by brent at 68  (-20.9% YoY). Macro context: local-economy GDP growth recently at 4.0%. The thesis hinges on three factors: demand trajectory through H2, feedstock/input-cost discipline, and management's tone on guidance during the call. We expect the print itself to be within consensus bounds; the read on forward commentary is the swing factor.</a:t>
             </a:r>
           </a:p>
         </p:txBody>
@@ -7772,7 +7772,7 @@
                 </a:solidFill>
                 <a:latin typeface="Calibri"/>
               </a:rPr>
-              <a:t>—</a:t>
+              <a:t>4.61%</a:t>
             </a:r>
           </a:p>
         </p:txBody>
@@ -8963,7 +8963,7 @@
                 </a:solidFill>
                 <a:latin typeface="Calibri"/>
               </a:rPr>
-              <a:t>Source: investing  |  Generated 13 May 2026  |  Analyst: Jabal Research</a:t>
+              <a:t>Source: investing, ishares, marketscreener  |  Generated 13 May 2026  |  Analyst: Jabal Research</a:t>
             </a:r>
           </a:p>
         </p:txBody>
@@ -9419,7 +9419,7 @@
                 </a:solidFill>
                 <a:latin typeface="Calibri"/>
               </a:rPr>
-              <a:t>52-WEEK PRICE  ·  </a:t>
+              <a:t>52-WEEK PRICE  ·  USD</a:t>
             </a:r>
           </a:p>
         </p:txBody>
@@ -9502,36 +9502,1467 @@
         </p:nvSpPr>
         <p:spPr>
           <a:xfrm>
-            <a:off x="3520440" y="2779776"/>
-            <a:ext cx="2926079" cy="274320"/>
-          </a:xfrm>
-          <a:prstGeom prst="rect">
-            <a:avLst/>
-          </a:prstGeom>
-          <a:noFill/>
-        </p:spPr>
-        <p:txBody>
-          <a:bodyPr wrap="square" lIns="0" rIns="0" tIns="0" bIns="0" anchor="t">
-            <a:spAutoFit/>
-          </a:bodyPr>
+            <a:off x="3520440" y="2066543"/>
+            <a:ext cx="502920" cy="182880"/>
+          </a:xfrm>
+          <a:prstGeom prst="rect">
+            <a:avLst/>
+          </a:prstGeom>
+          <a:noFill/>
+        </p:spPr>
+        <p:txBody>
+          <a:bodyPr wrap="square" lIns="0" rIns="0" tIns="0" bIns="0" anchor="t">
+            <a:spAutoFit/>
+          </a:bodyPr>
+          <a:lstStyle/>
+          <a:p>
+            <a:pPr algn="l"/>
+            <a:r>
+              <a:rPr sz="1000" b="0">
+                <a:solidFill>
+                  <a:srgbClr val="1A1A1A"/>
+                </a:solidFill>
+                <a:latin typeface="Calibri"/>
+              </a:rPr>
+              <a:t>FY2021</a:t>
+            </a:r>
+          </a:p>
+        </p:txBody>
+      </p:sp>
+      <p:sp>
+        <p:nvSpPr>
+          <p:cNvPr id="14" name="Rectangle 13"/>
+          <p:cNvSpPr/>
+          <p:nvPr/>
+        </p:nvSpPr>
+        <p:spPr>
+          <a:xfrm>
+            <a:off x="4023360" y="2121408"/>
+            <a:ext cx="1808155" cy="73152"/>
+          </a:xfrm>
+          <a:prstGeom prst="rect">
+            <a:avLst/>
+          </a:prstGeom>
+          <a:solidFill>
+            <a:srgbClr val="EFE8DC"/>
+          </a:solidFill>
+          <a:ln>
+            <a:noFill/>
+          </a:ln>
+        </p:spPr>
+        <p:style>
+          <a:lnRef idx="1">
+            <a:schemeClr val="accent1"/>
+          </a:lnRef>
+          <a:fillRef idx="3">
+            <a:schemeClr val="accent1"/>
+          </a:fillRef>
+          <a:effectRef idx="2">
+            <a:schemeClr val="accent1"/>
+          </a:effectRef>
+          <a:fontRef idx="minor">
+            <a:schemeClr val="lt1"/>
+          </a:fontRef>
+        </p:style>
+        <p:txBody>
+          <a:bodyPr rtlCol="0" anchor="ctr"/>
           <a:lstStyle/>
           <a:p>
             <a:pPr algn="ctr"/>
+          </a:p>
+        </p:txBody>
+      </p:sp>
+      <p:sp>
+        <p:nvSpPr>
+          <p:cNvPr id="15" name="Oval 14"/>
+          <p:cNvSpPr/>
+          <p:nvPr/>
+        </p:nvSpPr>
+        <p:spPr>
+          <a:xfrm>
+            <a:off x="5785795" y="2103120"/>
+            <a:ext cx="91440" cy="109728"/>
+          </a:xfrm>
+          <a:prstGeom prst="ellipse">
+            <a:avLst/>
+          </a:prstGeom>
+          <a:solidFill>
+            <a:srgbClr val="7E6849"/>
+          </a:solidFill>
+          <a:ln>
+            <a:noFill/>
+          </a:ln>
+        </p:spPr>
+        <p:style>
+          <a:lnRef idx="1">
+            <a:schemeClr val="accent1"/>
+          </a:lnRef>
+          <a:fillRef idx="3">
+            <a:schemeClr val="accent1"/>
+          </a:fillRef>
+          <a:effectRef idx="2">
+            <a:schemeClr val="accent1"/>
+          </a:effectRef>
+          <a:fontRef idx="minor">
+            <a:schemeClr val="lt1"/>
+          </a:fontRef>
+        </p:style>
+        <p:txBody>
+          <a:bodyPr rtlCol="0" anchor="ctr"/>
+          <a:lstStyle/>
+          <a:p>
+            <a:pPr algn="ctr"/>
+          </a:p>
+        </p:txBody>
+      </p:sp>
+      <p:sp>
+        <p:nvSpPr>
+          <p:cNvPr id="16" name="TextBox 15"/>
+          <p:cNvSpPr txBox="1"/>
+          <p:nvPr/>
+        </p:nvSpPr>
+        <p:spPr>
+          <a:xfrm>
+            <a:off x="5877235" y="2084831"/>
+            <a:ext cx="411480" cy="182880"/>
+          </a:xfrm>
+          <a:prstGeom prst="rect">
+            <a:avLst/>
+          </a:prstGeom>
+          <a:noFill/>
+        </p:spPr>
+        <p:txBody>
+          <a:bodyPr wrap="square" lIns="0" rIns="0" tIns="0" bIns="0" anchor="t">
+            <a:spAutoFit/>
+          </a:bodyPr>
+          <a:lstStyle/>
+          <a:p>
+            <a:pPr algn="l"/>
             <a:r>
               <a:rPr sz="1000" b="0">
                 <a:solidFill>
+                  <a:srgbClr val="1A1A1A"/>
+                </a:solidFill>
+                <a:latin typeface="Calibri"/>
+              </a:rPr>
+              <a:t>24.4x</a:t>
+            </a:r>
+          </a:p>
+        </p:txBody>
+      </p:sp>
+      <p:sp>
+        <p:nvSpPr>
+          <p:cNvPr id="17" name="TextBox 16"/>
+          <p:cNvSpPr txBox="1"/>
+          <p:nvPr/>
+        </p:nvSpPr>
+        <p:spPr>
+          <a:xfrm>
+            <a:off x="3520440" y="2340863"/>
+            <a:ext cx="502920" cy="182880"/>
+          </a:xfrm>
+          <a:prstGeom prst="rect">
+            <a:avLst/>
+          </a:prstGeom>
+          <a:noFill/>
+        </p:spPr>
+        <p:txBody>
+          <a:bodyPr wrap="square" lIns="0" rIns="0" tIns="0" bIns="0" anchor="t">
+            <a:spAutoFit/>
+          </a:bodyPr>
+          <a:lstStyle/>
+          <a:p>
+            <a:pPr algn="l"/>
+            <a:r>
+              <a:rPr sz="1000" b="0">
+                <a:solidFill>
+                  <a:srgbClr val="1A1A1A"/>
+                </a:solidFill>
+                <a:latin typeface="Calibri"/>
+              </a:rPr>
+              <a:t>FY2022</a:t>
+            </a:r>
+          </a:p>
+        </p:txBody>
+      </p:sp>
+      <p:sp>
+        <p:nvSpPr>
+          <p:cNvPr id="18" name="Rectangle 17"/>
+          <p:cNvSpPr/>
+          <p:nvPr/>
+        </p:nvSpPr>
+        <p:spPr>
+          <a:xfrm>
+            <a:off x="4023360" y="2395727"/>
+            <a:ext cx="635143" cy="73152"/>
+          </a:xfrm>
+          <a:prstGeom prst="rect">
+            <a:avLst/>
+          </a:prstGeom>
+          <a:solidFill>
+            <a:srgbClr val="EFE8DC"/>
+          </a:solidFill>
+          <a:ln>
+            <a:noFill/>
+          </a:ln>
+        </p:spPr>
+        <p:style>
+          <a:lnRef idx="1">
+            <a:schemeClr val="accent1"/>
+          </a:lnRef>
+          <a:fillRef idx="3">
+            <a:schemeClr val="accent1"/>
+          </a:fillRef>
+          <a:effectRef idx="2">
+            <a:schemeClr val="accent1"/>
+          </a:effectRef>
+          <a:fontRef idx="minor">
+            <a:schemeClr val="lt1"/>
+          </a:fontRef>
+        </p:style>
+        <p:txBody>
+          <a:bodyPr rtlCol="0" anchor="ctr"/>
+          <a:lstStyle/>
+          <a:p>
+            <a:pPr algn="ctr"/>
+          </a:p>
+        </p:txBody>
+      </p:sp>
+      <p:sp>
+        <p:nvSpPr>
+          <p:cNvPr id="19" name="Oval 18"/>
+          <p:cNvSpPr/>
+          <p:nvPr/>
+        </p:nvSpPr>
+        <p:spPr>
+          <a:xfrm>
+            <a:off x="4612783" y="2377439"/>
+            <a:ext cx="91440" cy="109728"/>
+          </a:xfrm>
+          <a:prstGeom prst="ellipse">
+            <a:avLst/>
+          </a:prstGeom>
+          <a:solidFill>
+            <a:srgbClr val="7E6849"/>
+          </a:solidFill>
+          <a:ln>
+            <a:noFill/>
+          </a:ln>
+        </p:spPr>
+        <p:style>
+          <a:lnRef idx="1">
+            <a:schemeClr val="accent1"/>
+          </a:lnRef>
+          <a:fillRef idx="3">
+            <a:schemeClr val="accent1"/>
+          </a:fillRef>
+          <a:effectRef idx="2">
+            <a:schemeClr val="accent1"/>
+          </a:effectRef>
+          <a:fontRef idx="minor">
+            <a:schemeClr val="lt1"/>
+          </a:fontRef>
+        </p:style>
+        <p:txBody>
+          <a:bodyPr rtlCol="0" anchor="ctr"/>
+          <a:lstStyle/>
+          <a:p>
+            <a:pPr algn="ctr"/>
+          </a:p>
+        </p:txBody>
+      </p:sp>
+      <p:sp>
+        <p:nvSpPr>
+          <p:cNvPr id="20" name="TextBox 19"/>
+          <p:cNvSpPr txBox="1"/>
+          <p:nvPr/>
+        </p:nvSpPr>
+        <p:spPr>
+          <a:xfrm>
+            <a:off x="4704223" y="2359151"/>
+            <a:ext cx="411480" cy="182880"/>
+          </a:xfrm>
+          <a:prstGeom prst="rect">
+            <a:avLst/>
+          </a:prstGeom>
+          <a:noFill/>
+        </p:spPr>
+        <p:txBody>
+          <a:bodyPr wrap="square" lIns="0" rIns="0" tIns="0" bIns="0" anchor="t">
+            <a:spAutoFit/>
+          </a:bodyPr>
+          <a:lstStyle/>
+          <a:p>
+            <a:pPr algn="l"/>
+            <a:r>
+              <a:rPr sz="1000" b="0">
+                <a:solidFill>
+                  <a:srgbClr val="1A1A1A"/>
+                </a:solidFill>
+                <a:latin typeface="Calibri"/>
+              </a:rPr>
+              <a:t>16.2x</a:t>
+            </a:r>
+          </a:p>
+        </p:txBody>
+      </p:sp>
+      <p:sp>
+        <p:nvSpPr>
+          <p:cNvPr id="21" name="TextBox 20"/>
+          <p:cNvSpPr txBox="1"/>
+          <p:nvPr/>
+        </p:nvSpPr>
+        <p:spPr>
+          <a:xfrm>
+            <a:off x="3520440" y="2615184"/>
+            <a:ext cx="502920" cy="182880"/>
+          </a:xfrm>
+          <a:prstGeom prst="rect">
+            <a:avLst/>
+          </a:prstGeom>
+          <a:noFill/>
+        </p:spPr>
+        <p:txBody>
+          <a:bodyPr wrap="square" lIns="0" rIns="0" tIns="0" bIns="0" anchor="t">
+            <a:spAutoFit/>
+          </a:bodyPr>
+          <a:lstStyle/>
+          <a:p>
+            <a:pPr algn="l"/>
+            <a:r>
+              <a:rPr sz="1000" b="0">
+                <a:solidFill>
+                  <a:srgbClr val="1A1A1A"/>
+                </a:solidFill>
+                <a:latin typeface="Calibri"/>
+              </a:rPr>
+              <a:t>FY2023</a:t>
+            </a:r>
+          </a:p>
+        </p:txBody>
+      </p:sp>
+      <p:sp>
+        <p:nvSpPr>
+          <p:cNvPr id="22" name="Rectangle 21"/>
+          <p:cNvSpPr/>
+          <p:nvPr/>
+        </p:nvSpPr>
+        <p:spPr>
+          <a:xfrm>
+            <a:off x="4023360" y="2670048"/>
+            <a:ext cx="577923" cy="73152"/>
+          </a:xfrm>
+          <a:prstGeom prst="rect">
+            <a:avLst/>
+          </a:prstGeom>
+          <a:solidFill>
+            <a:srgbClr val="EFE8DC"/>
+          </a:solidFill>
+          <a:ln>
+            <a:noFill/>
+          </a:ln>
+        </p:spPr>
+        <p:style>
+          <a:lnRef idx="1">
+            <a:schemeClr val="accent1"/>
+          </a:lnRef>
+          <a:fillRef idx="3">
+            <a:schemeClr val="accent1"/>
+          </a:fillRef>
+          <a:effectRef idx="2">
+            <a:schemeClr val="accent1"/>
+          </a:effectRef>
+          <a:fontRef idx="minor">
+            <a:schemeClr val="lt1"/>
+          </a:fontRef>
+        </p:style>
+        <p:txBody>
+          <a:bodyPr rtlCol="0" anchor="ctr"/>
+          <a:lstStyle/>
+          <a:p>
+            <a:pPr algn="ctr"/>
+          </a:p>
+        </p:txBody>
+      </p:sp>
+      <p:sp>
+        <p:nvSpPr>
+          <p:cNvPr id="23" name="Oval 22"/>
+          <p:cNvSpPr/>
+          <p:nvPr/>
+        </p:nvSpPr>
+        <p:spPr>
+          <a:xfrm>
+            <a:off x="4555563" y="2651760"/>
+            <a:ext cx="91440" cy="109728"/>
+          </a:xfrm>
+          <a:prstGeom prst="ellipse">
+            <a:avLst/>
+          </a:prstGeom>
+          <a:solidFill>
+            <a:srgbClr val="7E6849"/>
+          </a:solidFill>
+          <a:ln>
+            <a:noFill/>
+          </a:ln>
+        </p:spPr>
+        <p:style>
+          <a:lnRef idx="1">
+            <a:schemeClr val="accent1"/>
+          </a:lnRef>
+          <a:fillRef idx="3">
+            <a:schemeClr val="accent1"/>
+          </a:fillRef>
+          <a:effectRef idx="2">
+            <a:schemeClr val="accent1"/>
+          </a:effectRef>
+          <a:fontRef idx="minor">
+            <a:schemeClr val="lt1"/>
+          </a:fontRef>
+        </p:style>
+        <p:txBody>
+          <a:bodyPr rtlCol="0" anchor="ctr"/>
+          <a:lstStyle/>
+          <a:p>
+            <a:pPr algn="ctr"/>
+          </a:p>
+        </p:txBody>
+      </p:sp>
+      <p:sp>
+        <p:nvSpPr>
+          <p:cNvPr id="24" name="TextBox 23"/>
+          <p:cNvSpPr txBox="1"/>
+          <p:nvPr/>
+        </p:nvSpPr>
+        <p:spPr>
+          <a:xfrm>
+            <a:off x="4647003" y="2633472"/>
+            <a:ext cx="411480" cy="182880"/>
+          </a:xfrm>
+          <a:prstGeom prst="rect">
+            <a:avLst/>
+          </a:prstGeom>
+          <a:noFill/>
+        </p:spPr>
+        <p:txBody>
+          <a:bodyPr wrap="square" lIns="0" rIns="0" tIns="0" bIns="0" anchor="t">
+            <a:spAutoFit/>
+          </a:bodyPr>
+          <a:lstStyle/>
+          <a:p>
+            <a:pPr algn="l"/>
+            <a:r>
+              <a:rPr sz="1000" b="0">
+                <a:solidFill>
+                  <a:srgbClr val="1A1A1A"/>
+                </a:solidFill>
+                <a:latin typeface="Calibri"/>
+              </a:rPr>
+              <a:t>15.8x</a:t>
+            </a:r>
+          </a:p>
+        </p:txBody>
+      </p:sp>
+      <p:sp>
+        <p:nvSpPr>
+          <p:cNvPr id="25" name="TextBox 24"/>
+          <p:cNvSpPr txBox="1"/>
+          <p:nvPr/>
+        </p:nvSpPr>
+        <p:spPr>
+          <a:xfrm>
+            <a:off x="3520440" y="2889503"/>
+            <a:ext cx="502920" cy="182880"/>
+          </a:xfrm>
+          <a:prstGeom prst="rect">
+            <a:avLst/>
+          </a:prstGeom>
+          <a:noFill/>
+        </p:spPr>
+        <p:txBody>
+          <a:bodyPr wrap="square" lIns="0" rIns="0" tIns="0" bIns="0" anchor="t">
+            <a:spAutoFit/>
+          </a:bodyPr>
+          <a:lstStyle/>
+          <a:p>
+            <a:pPr algn="l"/>
+            <a:r>
+              <a:rPr sz="1000" b="0">
+                <a:solidFill>
+                  <a:srgbClr val="1A1A1A"/>
+                </a:solidFill>
+                <a:latin typeface="Calibri"/>
+              </a:rPr>
+              <a:t>FY2024</a:t>
+            </a:r>
+          </a:p>
+        </p:txBody>
+      </p:sp>
+      <p:sp>
+        <p:nvSpPr>
+          <p:cNvPr id="26" name="Rectangle 25"/>
+          <p:cNvSpPr/>
+          <p:nvPr/>
+        </p:nvSpPr>
+        <p:spPr>
+          <a:xfrm>
+            <a:off x="4023360" y="2944368"/>
+            <a:ext cx="878328" cy="73152"/>
+          </a:xfrm>
+          <a:prstGeom prst="rect">
+            <a:avLst/>
+          </a:prstGeom>
+          <a:solidFill>
+            <a:srgbClr val="EFE8DC"/>
+          </a:solidFill>
+          <a:ln>
+            <a:noFill/>
+          </a:ln>
+        </p:spPr>
+        <p:style>
+          <a:lnRef idx="1">
+            <a:schemeClr val="accent1"/>
+          </a:lnRef>
+          <a:fillRef idx="3">
+            <a:schemeClr val="accent1"/>
+          </a:fillRef>
+          <a:effectRef idx="2">
+            <a:schemeClr val="accent1"/>
+          </a:effectRef>
+          <a:fontRef idx="minor">
+            <a:schemeClr val="lt1"/>
+          </a:fontRef>
+        </p:style>
+        <p:txBody>
+          <a:bodyPr rtlCol="0" anchor="ctr"/>
+          <a:lstStyle/>
+          <a:p>
+            <a:pPr algn="ctr"/>
+          </a:p>
+        </p:txBody>
+      </p:sp>
+      <p:sp>
+        <p:nvSpPr>
+          <p:cNvPr id="27" name="Oval 26"/>
+          <p:cNvSpPr/>
+          <p:nvPr/>
+        </p:nvSpPr>
+        <p:spPr>
+          <a:xfrm>
+            <a:off x="4855968" y="2926079"/>
+            <a:ext cx="91440" cy="109728"/>
+          </a:xfrm>
+          <a:prstGeom prst="ellipse">
+            <a:avLst/>
+          </a:prstGeom>
+          <a:solidFill>
+            <a:srgbClr val="7E6849"/>
+          </a:solidFill>
+          <a:ln>
+            <a:noFill/>
+          </a:ln>
+        </p:spPr>
+        <p:style>
+          <a:lnRef idx="1">
+            <a:schemeClr val="accent1"/>
+          </a:lnRef>
+          <a:fillRef idx="3">
+            <a:schemeClr val="accent1"/>
+          </a:fillRef>
+          <a:effectRef idx="2">
+            <a:schemeClr val="accent1"/>
+          </a:effectRef>
+          <a:fontRef idx="minor">
+            <a:schemeClr val="lt1"/>
+          </a:fontRef>
+        </p:style>
+        <p:txBody>
+          <a:bodyPr rtlCol="0" anchor="ctr"/>
+          <a:lstStyle/>
+          <a:p>
+            <a:pPr algn="ctr"/>
+          </a:p>
+        </p:txBody>
+      </p:sp>
+      <p:sp>
+        <p:nvSpPr>
+          <p:cNvPr id="28" name="TextBox 27"/>
+          <p:cNvSpPr txBox="1"/>
+          <p:nvPr/>
+        </p:nvSpPr>
+        <p:spPr>
+          <a:xfrm>
+            <a:off x="4947408" y="2907791"/>
+            <a:ext cx="411480" cy="182880"/>
+          </a:xfrm>
+          <a:prstGeom prst="rect">
+            <a:avLst/>
+          </a:prstGeom>
+          <a:noFill/>
+        </p:spPr>
+        <p:txBody>
+          <a:bodyPr wrap="square" lIns="0" rIns="0" tIns="0" bIns="0" anchor="t">
+            <a:spAutoFit/>
+          </a:bodyPr>
+          <a:lstStyle/>
+          <a:p>
+            <a:pPr algn="l"/>
+            <a:r>
+              <a:rPr sz="1000" b="0">
+                <a:solidFill>
+                  <a:srgbClr val="1A1A1A"/>
+                </a:solidFill>
+                <a:latin typeface="Calibri"/>
+              </a:rPr>
+              <a:t>17.9x</a:t>
+            </a:r>
+          </a:p>
+        </p:txBody>
+      </p:sp>
+      <p:sp>
+        <p:nvSpPr>
+          <p:cNvPr id="29" name="TextBox 28"/>
+          <p:cNvSpPr txBox="1"/>
+          <p:nvPr/>
+        </p:nvSpPr>
+        <p:spPr>
+          <a:xfrm>
+            <a:off x="3520440" y="3163824"/>
+            <a:ext cx="502920" cy="182880"/>
+          </a:xfrm>
+          <a:prstGeom prst="rect">
+            <a:avLst/>
+          </a:prstGeom>
+          <a:noFill/>
+        </p:spPr>
+        <p:txBody>
+          <a:bodyPr wrap="square" lIns="0" rIns="0" tIns="0" bIns="0" anchor="t">
+            <a:spAutoFit/>
+          </a:bodyPr>
+          <a:lstStyle/>
+          <a:p>
+            <a:pPr algn="l"/>
+            <a:r>
+              <a:rPr sz="1000" b="0">
+                <a:solidFill>
+                  <a:srgbClr val="1A1A1A"/>
+                </a:solidFill>
+                <a:latin typeface="Calibri"/>
+              </a:rPr>
+              <a:t>FY2025</a:t>
+            </a:r>
+          </a:p>
+        </p:txBody>
+      </p:sp>
+      <p:sp>
+        <p:nvSpPr>
+          <p:cNvPr id="30" name="Rectangle 29"/>
+          <p:cNvSpPr/>
+          <p:nvPr/>
+        </p:nvSpPr>
+        <p:spPr>
+          <a:xfrm>
+            <a:off x="4023360" y="3218688"/>
+            <a:ext cx="606533" cy="73152"/>
+          </a:xfrm>
+          <a:prstGeom prst="rect">
+            <a:avLst/>
+          </a:prstGeom>
+          <a:solidFill>
+            <a:srgbClr val="EFE8DC"/>
+          </a:solidFill>
+          <a:ln>
+            <a:noFill/>
+          </a:ln>
+        </p:spPr>
+        <p:style>
+          <a:lnRef idx="1">
+            <a:schemeClr val="accent1"/>
+          </a:lnRef>
+          <a:fillRef idx="3">
+            <a:schemeClr val="accent1"/>
+          </a:fillRef>
+          <a:effectRef idx="2">
+            <a:schemeClr val="accent1"/>
+          </a:effectRef>
+          <a:fontRef idx="minor">
+            <a:schemeClr val="lt1"/>
+          </a:fontRef>
+        </p:style>
+        <p:txBody>
+          <a:bodyPr rtlCol="0" anchor="ctr"/>
+          <a:lstStyle/>
+          <a:p>
+            <a:pPr algn="ctr"/>
+          </a:p>
+        </p:txBody>
+      </p:sp>
+      <p:sp>
+        <p:nvSpPr>
+          <p:cNvPr id="31" name="Oval 30"/>
+          <p:cNvSpPr/>
+          <p:nvPr/>
+        </p:nvSpPr>
+        <p:spPr>
+          <a:xfrm>
+            <a:off x="4584173" y="3200400"/>
+            <a:ext cx="91440" cy="109728"/>
+          </a:xfrm>
+          <a:prstGeom prst="ellipse">
+            <a:avLst/>
+          </a:prstGeom>
+          <a:solidFill>
+            <a:srgbClr val="7E6849"/>
+          </a:solidFill>
+          <a:ln>
+            <a:noFill/>
+          </a:ln>
+        </p:spPr>
+        <p:style>
+          <a:lnRef idx="1">
+            <a:schemeClr val="accent1"/>
+          </a:lnRef>
+          <a:fillRef idx="3">
+            <a:schemeClr val="accent1"/>
+          </a:fillRef>
+          <a:effectRef idx="2">
+            <a:schemeClr val="accent1"/>
+          </a:effectRef>
+          <a:fontRef idx="minor">
+            <a:schemeClr val="lt1"/>
+          </a:fontRef>
+        </p:style>
+        <p:txBody>
+          <a:bodyPr rtlCol="0" anchor="ctr"/>
+          <a:lstStyle/>
+          <a:p>
+            <a:pPr algn="ctr"/>
+          </a:p>
+        </p:txBody>
+      </p:sp>
+      <p:sp>
+        <p:nvSpPr>
+          <p:cNvPr id="32" name="TextBox 31"/>
+          <p:cNvSpPr txBox="1"/>
+          <p:nvPr/>
+        </p:nvSpPr>
+        <p:spPr>
+          <a:xfrm>
+            <a:off x="4675613" y="3182112"/>
+            <a:ext cx="411480" cy="182880"/>
+          </a:xfrm>
+          <a:prstGeom prst="rect">
+            <a:avLst/>
+          </a:prstGeom>
+          <a:noFill/>
+        </p:spPr>
+        <p:txBody>
+          <a:bodyPr wrap="square" lIns="0" rIns="0" tIns="0" bIns="0" anchor="t">
+            <a:spAutoFit/>
+          </a:bodyPr>
+          <a:lstStyle/>
+          <a:p>
+            <a:pPr algn="l"/>
+            <a:r>
+              <a:rPr sz="1000" b="0">
+                <a:solidFill>
+                  <a:srgbClr val="1A1A1A"/>
+                </a:solidFill>
+                <a:latin typeface="Calibri"/>
+              </a:rPr>
+              <a:t>16.0x</a:t>
+            </a:r>
+          </a:p>
+        </p:txBody>
+      </p:sp>
+      <p:sp>
+        <p:nvSpPr>
+          <p:cNvPr id="33" name="TextBox 32"/>
+          <p:cNvSpPr txBox="1"/>
+          <p:nvPr/>
+        </p:nvSpPr>
+        <p:spPr>
+          <a:xfrm>
+            <a:off x="3520440" y="3438144"/>
+            <a:ext cx="502920" cy="182880"/>
+          </a:xfrm>
+          <a:prstGeom prst="rect">
+            <a:avLst/>
+          </a:prstGeom>
+          <a:noFill/>
+        </p:spPr>
+        <p:txBody>
+          <a:bodyPr wrap="square" lIns="0" rIns="0" tIns="0" bIns="0" anchor="t">
+            <a:spAutoFit/>
+          </a:bodyPr>
+          <a:lstStyle/>
+          <a:p>
+            <a:pPr algn="l"/>
+            <a:r>
+              <a:rPr sz="1000" b="0">
+                <a:solidFill>
+                  <a:srgbClr val="1A1A1A"/>
+                </a:solidFill>
+                <a:latin typeface="Calibri"/>
+              </a:rPr>
+              <a:t>FY2026</a:t>
+            </a:r>
+          </a:p>
+        </p:txBody>
+      </p:sp>
+      <p:sp>
+        <p:nvSpPr>
+          <p:cNvPr id="34" name="Rectangle 33"/>
+          <p:cNvSpPr/>
+          <p:nvPr/>
+        </p:nvSpPr>
+        <p:spPr>
+          <a:xfrm>
+            <a:off x="4023360" y="3493008"/>
+            <a:ext cx="892633" cy="73152"/>
+          </a:xfrm>
+          <a:prstGeom prst="rect">
+            <a:avLst/>
+          </a:prstGeom>
+          <a:solidFill>
+            <a:srgbClr val="EFE8DC"/>
+          </a:solidFill>
+          <a:ln>
+            <a:noFill/>
+          </a:ln>
+        </p:spPr>
+        <p:style>
+          <a:lnRef idx="1">
+            <a:schemeClr val="accent1"/>
+          </a:lnRef>
+          <a:fillRef idx="3">
+            <a:schemeClr val="accent1"/>
+          </a:fillRef>
+          <a:effectRef idx="2">
+            <a:schemeClr val="accent1"/>
+          </a:effectRef>
+          <a:fontRef idx="minor">
+            <a:schemeClr val="lt1"/>
+          </a:fontRef>
+        </p:style>
+        <p:txBody>
+          <a:bodyPr rtlCol="0" anchor="ctr"/>
+          <a:lstStyle/>
+          <a:p>
+            <a:pPr algn="ctr"/>
+          </a:p>
+        </p:txBody>
+      </p:sp>
+      <p:sp>
+        <p:nvSpPr>
+          <p:cNvPr id="35" name="Oval 34"/>
+          <p:cNvSpPr/>
+          <p:nvPr/>
+        </p:nvSpPr>
+        <p:spPr>
+          <a:xfrm>
+            <a:off x="4870273" y="3474720"/>
+            <a:ext cx="91440" cy="109728"/>
+          </a:xfrm>
+          <a:prstGeom prst="ellipse">
+            <a:avLst/>
+          </a:prstGeom>
+          <a:solidFill>
+            <a:srgbClr val="7E6849"/>
+          </a:solidFill>
+          <a:ln>
+            <a:noFill/>
+          </a:ln>
+        </p:spPr>
+        <p:style>
+          <a:lnRef idx="1">
+            <a:schemeClr val="accent1"/>
+          </a:lnRef>
+          <a:fillRef idx="3">
+            <a:schemeClr val="accent1"/>
+          </a:fillRef>
+          <a:effectRef idx="2">
+            <a:schemeClr val="accent1"/>
+          </a:effectRef>
+          <a:fontRef idx="minor">
+            <a:schemeClr val="lt1"/>
+          </a:fontRef>
+        </p:style>
+        <p:txBody>
+          <a:bodyPr rtlCol="0" anchor="ctr"/>
+          <a:lstStyle/>
+          <a:p>
+            <a:pPr algn="ctr"/>
+          </a:p>
+        </p:txBody>
+      </p:sp>
+      <p:sp>
+        <p:nvSpPr>
+          <p:cNvPr id="36" name="TextBox 35"/>
+          <p:cNvSpPr txBox="1"/>
+          <p:nvPr/>
+        </p:nvSpPr>
+        <p:spPr>
+          <a:xfrm>
+            <a:off x="4961713" y="3456432"/>
+            <a:ext cx="411480" cy="182880"/>
+          </a:xfrm>
+          <a:prstGeom prst="rect">
+            <a:avLst/>
+          </a:prstGeom>
+          <a:noFill/>
+        </p:spPr>
+        <p:txBody>
+          <a:bodyPr wrap="square" lIns="0" rIns="0" tIns="0" bIns="0" anchor="t">
+            <a:spAutoFit/>
+          </a:bodyPr>
+          <a:lstStyle/>
+          <a:p>
+            <a:pPr algn="l"/>
+            <a:r>
+              <a:rPr sz="1000" b="0">
+                <a:solidFill>
+                  <a:srgbClr val="1A1A1A"/>
+                </a:solidFill>
+                <a:latin typeface="Calibri"/>
+              </a:rPr>
+              <a:t>18.0x</a:t>
+            </a:r>
+          </a:p>
+        </p:txBody>
+      </p:sp>
+      <p:sp>
+        <p:nvSpPr>
+          <p:cNvPr id="37" name="TextBox 36"/>
+          <p:cNvSpPr txBox="1"/>
+          <p:nvPr/>
+        </p:nvSpPr>
+        <p:spPr>
+          <a:xfrm>
+            <a:off x="3520440" y="3712463"/>
+            <a:ext cx="502920" cy="182880"/>
+          </a:xfrm>
+          <a:prstGeom prst="rect">
+            <a:avLst/>
+          </a:prstGeom>
+          <a:noFill/>
+        </p:spPr>
+        <p:txBody>
+          <a:bodyPr wrap="square" lIns="0" rIns="0" tIns="0" bIns="0" anchor="t">
+            <a:spAutoFit/>
+          </a:bodyPr>
+          <a:lstStyle/>
+          <a:p>
+            <a:pPr algn="l"/>
+            <a:r>
+              <a:rPr sz="1000" b="0">
+                <a:solidFill>
+                  <a:srgbClr val="1A1A1A"/>
+                </a:solidFill>
+                <a:latin typeface="Calibri"/>
+              </a:rPr>
+              <a:t>FY2027</a:t>
+            </a:r>
+          </a:p>
+        </p:txBody>
+      </p:sp>
+      <p:sp>
+        <p:nvSpPr>
+          <p:cNvPr id="38" name="Rectangle 37"/>
+          <p:cNvSpPr/>
+          <p:nvPr/>
+        </p:nvSpPr>
+        <p:spPr>
+          <a:xfrm>
+            <a:off x="4023360" y="3767327"/>
+            <a:ext cx="678058" cy="73152"/>
+          </a:xfrm>
+          <a:prstGeom prst="rect">
+            <a:avLst/>
+          </a:prstGeom>
+          <a:solidFill>
+            <a:srgbClr val="EFE8DC"/>
+          </a:solidFill>
+          <a:ln>
+            <a:noFill/>
+          </a:ln>
+        </p:spPr>
+        <p:style>
+          <a:lnRef idx="1">
+            <a:schemeClr val="accent1"/>
+          </a:lnRef>
+          <a:fillRef idx="3">
+            <a:schemeClr val="accent1"/>
+          </a:fillRef>
+          <a:effectRef idx="2">
+            <a:schemeClr val="accent1"/>
+          </a:effectRef>
+          <a:fontRef idx="minor">
+            <a:schemeClr val="lt1"/>
+          </a:fontRef>
+        </p:style>
+        <p:txBody>
+          <a:bodyPr rtlCol="0" anchor="ctr"/>
+          <a:lstStyle/>
+          <a:p>
+            <a:pPr algn="ctr"/>
+          </a:p>
+        </p:txBody>
+      </p:sp>
+      <p:sp>
+        <p:nvSpPr>
+          <p:cNvPr id="39" name="Oval 38"/>
+          <p:cNvSpPr/>
+          <p:nvPr/>
+        </p:nvSpPr>
+        <p:spPr>
+          <a:xfrm>
+            <a:off x="4655698" y="3749039"/>
+            <a:ext cx="91440" cy="109728"/>
+          </a:xfrm>
+          <a:prstGeom prst="ellipse">
+            <a:avLst/>
+          </a:prstGeom>
+          <a:solidFill>
+            <a:srgbClr val="7E6849"/>
+          </a:solidFill>
+          <a:ln>
+            <a:noFill/>
+          </a:ln>
+        </p:spPr>
+        <p:style>
+          <a:lnRef idx="1">
+            <a:schemeClr val="accent1"/>
+          </a:lnRef>
+          <a:fillRef idx="3">
+            <a:schemeClr val="accent1"/>
+          </a:fillRef>
+          <a:effectRef idx="2">
+            <a:schemeClr val="accent1"/>
+          </a:effectRef>
+          <a:fontRef idx="minor">
+            <a:schemeClr val="lt1"/>
+          </a:fontRef>
+        </p:style>
+        <p:txBody>
+          <a:bodyPr rtlCol="0" anchor="ctr"/>
+          <a:lstStyle/>
+          <a:p>
+            <a:pPr algn="ctr"/>
+          </a:p>
+        </p:txBody>
+      </p:sp>
+      <p:sp>
+        <p:nvSpPr>
+          <p:cNvPr id="40" name="TextBox 39"/>
+          <p:cNvSpPr txBox="1"/>
+          <p:nvPr/>
+        </p:nvSpPr>
+        <p:spPr>
+          <a:xfrm>
+            <a:off x="4747138" y="3730751"/>
+            <a:ext cx="411480" cy="182880"/>
+          </a:xfrm>
+          <a:prstGeom prst="rect">
+            <a:avLst/>
+          </a:prstGeom>
+          <a:noFill/>
+        </p:spPr>
+        <p:txBody>
+          <a:bodyPr wrap="square" lIns="0" rIns="0" tIns="0" bIns="0" anchor="t">
+            <a:spAutoFit/>
+          </a:bodyPr>
+          <a:lstStyle/>
+          <a:p>
+            <a:pPr algn="l"/>
+            <a:r>
+              <a:rPr sz="1000" b="0">
+                <a:solidFill>
+                  <a:srgbClr val="1A1A1A"/>
+                </a:solidFill>
+                <a:latin typeface="Calibri"/>
+              </a:rPr>
+              <a:t>16.5x</a:t>
+            </a:r>
+          </a:p>
+        </p:txBody>
+      </p:sp>
+      <p:sp>
+        <p:nvSpPr>
+          <p:cNvPr id="41" name="TextBox 40"/>
+          <p:cNvSpPr txBox="1"/>
+          <p:nvPr/>
+        </p:nvSpPr>
+        <p:spPr>
+          <a:xfrm>
+            <a:off x="3520440" y="3986783"/>
+            <a:ext cx="502920" cy="182880"/>
+          </a:xfrm>
+          <a:prstGeom prst="rect">
+            <a:avLst/>
+          </a:prstGeom>
+          <a:noFill/>
+        </p:spPr>
+        <p:txBody>
+          <a:bodyPr wrap="square" lIns="0" rIns="0" tIns="0" bIns="0" anchor="t">
+            <a:spAutoFit/>
+          </a:bodyPr>
+          <a:lstStyle/>
+          <a:p>
+            <a:pPr algn="l"/>
+            <a:r>
+              <a:rPr sz="1000" b="0">
+                <a:solidFill>
+                  <a:srgbClr val="1A1A1A"/>
+                </a:solidFill>
+                <a:latin typeface="Calibri"/>
+              </a:rPr>
+              <a:t>FY2028</a:t>
+            </a:r>
+          </a:p>
+        </p:txBody>
+      </p:sp>
+      <p:sp>
+        <p:nvSpPr>
+          <p:cNvPr id="42" name="Rectangle 41"/>
+          <p:cNvSpPr/>
+          <p:nvPr/>
+        </p:nvSpPr>
+        <p:spPr>
+          <a:xfrm>
+            <a:off x="4023360" y="4041647"/>
+            <a:ext cx="420567" cy="73152"/>
+          </a:xfrm>
+          <a:prstGeom prst="rect">
+            <a:avLst/>
+          </a:prstGeom>
+          <a:solidFill>
+            <a:srgbClr val="EFE8DC"/>
+          </a:solidFill>
+          <a:ln>
+            <a:noFill/>
+          </a:ln>
+        </p:spPr>
+        <p:style>
+          <a:lnRef idx="1">
+            <a:schemeClr val="accent1"/>
+          </a:lnRef>
+          <a:fillRef idx="3">
+            <a:schemeClr val="accent1"/>
+          </a:fillRef>
+          <a:effectRef idx="2">
+            <a:schemeClr val="accent1"/>
+          </a:effectRef>
+          <a:fontRef idx="minor">
+            <a:schemeClr val="lt1"/>
+          </a:fontRef>
+        </p:style>
+        <p:txBody>
+          <a:bodyPr rtlCol="0" anchor="ctr"/>
+          <a:lstStyle/>
+          <a:p>
+            <a:pPr algn="ctr"/>
+          </a:p>
+        </p:txBody>
+      </p:sp>
+      <p:sp>
+        <p:nvSpPr>
+          <p:cNvPr id="43" name="Oval 42"/>
+          <p:cNvSpPr/>
+          <p:nvPr/>
+        </p:nvSpPr>
+        <p:spPr>
+          <a:xfrm>
+            <a:off x="4398207" y="4023359"/>
+            <a:ext cx="91440" cy="109728"/>
+          </a:xfrm>
+          <a:prstGeom prst="ellipse">
+            <a:avLst/>
+          </a:prstGeom>
+          <a:solidFill>
+            <a:srgbClr val="7E6849"/>
+          </a:solidFill>
+          <a:ln>
+            <a:noFill/>
+          </a:ln>
+        </p:spPr>
+        <p:style>
+          <a:lnRef idx="1">
+            <a:schemeClr val="accent1"/>
+          </a:lnRef>
+          <a:fillRef idx="3">
+            <a:schemeClr val="accent1"/>
+          </a:fillRef>
+          <a:effectRef idx="2">
+            <a:schemeClr val="accent1"/>
+          </a:effectRef>
+          <a:fontRef idx="minor">
+            <a:schemeClr val="lt1"/>
+          </a:fontRef>
+        </p:style>
+        <p:txBody>
+          <a:bodyPr rtlCol="0" anchor="ctr"/>
+          <a:lstStyle/>
+          <a:p>
+            <a:pPr algn="ctr"/>
+          </a:p>
+        </p:txBody>
+      </p:sp>
+      <p:sp>
+        <p:nvSpPr>
+          <p:cNvPr id="44" name="TextBox 43"/>
+          <p:cNvSpPr txBox="1"/>
+          <p:nvPr/>
+        </p:nvSpPr>
+        <p:spPr>
+          <a:xfrm>
+            <a:off x="4489647" y="4005071"/>
+            <a:ext cx="411480" cy="182880"/>
+          </a:xfrm>
+          <a:prstGeom prst="rect">
+            <a:avLst/>
+          </a:prstGeom>
+          <a:noFill/>
+        </p:spPr>
+        <p:txBody>
+          <a:bodyPr wrap="square" lIns="0" rIns="0" tIns="0" bIns="0" anchor="t">
+            <a:spAutoFit/>
+          </a:bodyPr>
+          <a:lstStyle/>
+          <a:p>
+            <a:pPr algn="l"/>
+            <a:r>
+              <a:rPr sz="1000" b="0">
+                <a:solidFill>
+                  <a:srgbClr val="1A1A1A"/>
+                </a:solidFill>
+                <a:latin typeface="Calibri"/>
+              </a:rPr>
+              <a:t>14.7x</a:t>
+            </a:r>
+          </a:p>
+        </p:txBody>
+      </p:sp>
+      <p:sp>
+        <p:nvSpPr>
+          <p:cNvPr id="45" name="TextBox 44"/>
+          <p:cNvSpPr txBox="1"/>
+          <p:nvPr/>
+        </p:nvSpPr>
+        <p:spPr>
+          <a:xfrm>
+            <a:off x="3886200" y="4297680"/>
+            <a:ext cx="365760" cy="164592"/>
+          </a:xfrm>
+          <a:prstGeom prst="rect">
+            <a:avLst/>
+          </a:prstGeom>
+          <a:noFill/>
+        </p:spPr>
+        <p:txBody>
+          <a:bodyPr wrap="square" lIns="0" rIns="0" tIns="0" bIns="0" anchor="t">
+            <a:spAutoFit/>
+          </a:bodyPr>
+          <a:lstStyle/>
+          <a:p>
+            <a:pPr algn="l"/>
+            <a:r>
+              <a:rPr sz="700" b="0">
+                <a:solidFill>
                   <a:srgbClr val="9A9A9A"/>
                 </a:solidFill>
                 <a:latin typeface="Calibri"/>
               </a:rPr>
-              <a:t>No P/E history available</a:t>
-            </a:r>
-          </a:p>
-        </p:txBody>
-      </p:sp>
-      <p:sp>
-        <p:nvSpPr>
-          <p:cNvPr id="14" name="Rectangle 13"/>
+              <a:t>12x</a:t>
+            </a:r>
+          </a:p>
+        </p:txBody>
+      </p:sp>
+      <p:sp>
+        <p:nvSpPr>
+          <p:cNvPr id="46" name="TextBox 45"/>
+          <p:cNvSpPr txBox="1"/>
+          <p:nvPr/>
+        </p:nvSpPr>
+        <p:spPr>
+          <a:xfrm>
+            <a:off x="4663440" y="4297680"/>
+            <a:ext cx="365760" cy="164592"/>
+          </a:xfrm>
+          <a:prstGeom prst="rect">
+            <a:avLst/>
+          </a:prstGeom>
+          <a:noFill/>
+        </p:spPr>
+        <p:txBody>
+          <a:bodyPr wrap="square" lIns="0" rIns="0" tIns="0" bIns="0" anchor="t">
+            <a:spAutoFit/>
+          </a:bodyPr>
+          <a:lstStyle/>
+          <a:p>
+            <a:pPr algn="l"/>
+            <a:r>
+              <a:rPr sz="700" b="0">
+                <a:solidFill>
+                  <a:srgbClr val="9A9A9A"/>
+                </a:solidFill>
+                <a:latin typeface="Calibri"/>
+              </a:rPr>
+              <a:t>17x</a:t>
+            </a:r>
+          </a:p>
+        </p:txBody>
+      </p:sp>
+      <p:sp>
+        <p:nvSpPr>
+          <p:cNvPr id="47" name="TextBox 46"/>
+          <p:cNvSpPr txBox="1"/>
+          <p:nvPr/>
+        </p:nvSpPr>
+        <p:spPr>
+          <a:xfrm>
+            <a:off x="5440679" y="4297680"/>
+            <a:ext cx="365760" cy="164592"/>
+          </a:xfrm>
+          <a:prstGeom prst="rect">
+            <a:avLst/>
+          </a:prstGeom>
+          <a:noFill/>
+        </p:spPr>
+        <p:txBody>
+          <a:bodyPr wrap="square" lIns="0" rIns="0" tIns="0" bIns="0" anchor="t">
+            <a:spAutoFit/>
+          </a:bodyPr>
+          <a:lstStyle/>
+          <a:p>
+            <a:pPr algn="l"/>
+            <a:r>
+              <a:rPr sz="700" b="0">
+                <a:solidFill>
+                  <a:srgbClr val="9A9A9A"/>
+                </a:solidFill>
+                <a:latin typeface="Calibri"/>
+              </a:rPr>
+              <a:t>23x</a:t>
+            </a:r>
+          </a:p>
+        </p:txBody>
+      </p:sp>
+      <p:sp>
+        <p:nvSpPr>
+          <p:cNvPr id="48" name="TextBox 47"/>
+          <p:cNvSpPr txBox="1"/>
+          <p:nvPr/>
+        </p:nvSpPr>
+        <p:spPr>
+          <a:xfrm>
+            <a:off x="6217920" y="4297680"/>
+            <a:ext cx="365760" cy="164592"/>
+          </a:xfrm>
+          <a:prstGeom prst="rect">
+            <a:avLst/>
+          </a:prstGeom>
+          <a:noFill/>
+        </p:spPr>
+        <p:txBody>
+          <a:bodyPr wrap="square" lIns="0" rIns="0" tIns="0" bIns="0" anchor="t">
+            <a:spAutoFit/>
+          </a:bodyPr>
+          <a:lstStyle/>
+          <a:p>
+            <a:pPr algn="l"/>
+            <a:r>
+              <a:rPr sz="700" b="0">
+                <a:solidFill>
+                  <a:srgbClr val="9A9A9A"/>
+                </a:solidFill>
+                <a:latin typeface="Calibri"/>
+              </a:rPr>
+              <a:t>28x</a:t>
+            </a:r>
+          </a:p>
+        </p:txBody>
+      </p:sp>
+      <p:sp>
+        <p:nvSpPr>
+          <p:cNvPr id="49" name="Diamond 48"/>
+          <p:cNvSpPr/>
+          <p:nvPr/>
+        </p:nvSpPr>
+        <p:spPr>
+          <a:xfrm>
+            <a:off x="4370775" y="4242816"/>
+            <a:ext cx="146304" cy="146304"/>
+          </a:xfrm>
+          <a:prstGeom prst="diamond">
+            <a:avLst/>
+          </a:prstGeom>
+          <a:solidFill>
+            <a:srgbClr val="1A1A1A"/>
+          </a:solidFill>
+          <a:ln>
+            <a:noFill/>
+          </a:ln>
+        </p:spPr>
+        <p:style>
+          <a:lnRef idx="1">
+            <a:schemeClr val="accent1"/>
+          </a:lnRef>
+          <a:fillRef idx="3">
+            <a:schemeClr val="accent1"/>
+          </a:fillRef>
+          <a:effectRef idx="2">
+            <a:schemeClr val="accent1"/>
+          </a:effectRef>
+          <a:fontRef idx="minor">
+            <a:schemeClr val="lt1"/>
+          </a:fontRef>
+        </p:style>
+        <p:txBody>
+          <a:bodyPr rtlCol="0" anchor="ctr"/>
+          <a:lstStyle/>
+          <a:p>
+            <a:pPr algn="ctr"/>
+          </a:p>
+        </p:txBody>
+      </p:sp>
+      <p:sp>
+        <p:nvSpPr>
+          <p:cNvPr id="50" name="TextBox 49"/>
+          <p:cNvSpPr txBox="1"/>
+          <p:nvPr/>
+        </p:nvSpPr>
+        <p:spPr>
+          <a:xfrm>
+            <a:off x="4535367" y="4224528"/>
+            <a:ext cx="1280160" cy="164592"/>
+          </a:xfrm>
+          <a:prstGeom prst="rect">
+            <a:avLst/>
+          </a:prstGeom>
+          <a:noFill/>
+        </p:spPr>
+        <p:txBody>
+          <a:bodyPr wrap="square" lIns="0" rIns="0" tIns="0" bIns="0" anchor="t">
+            <a:spAutoFit/>
+          </a:bodyPr>
+          <a:lstStyle/>
+          <a:p>
+            <a:pPr algn="l"/>
+            <a:r>
+              <a:rPr sz="700" b="0">
+                <a:solidFill>
+                  <a:srgbClr val="1A1A1A"/>
+                </a:solidFill>
+                <a:latin typeface="Calibri"/>
+              </a:rPr>
+              <a:t>Current  (14.7x)</a:t>
+            </a:r>
+          </a:p>
+        </p:txBody>
+      </p:sp>
+      <p:sp>
+        <p:nvSpPr>
+          <p:cNvPr id="51" name="Rectangle 50"/>
           <p:cNvSpPr/>
           <p:nvPr/>
         </p:nvSpPr>
@@ -9575,7 +11006,7 @@
       </p:sp>
       <p:sp>
         <p:nvSpPr>
-          <p:cNvPr id="15" name="TextBox 14"/>
+          <p:cNvPr id="52" name="TextBox 51"/>
           <p:cNvSpPr txBox="1"/>
           <p:nvPr/>
         </p:nvSpPr>
@@ -9610,7 +11041,7 @@
       </p:sp>
       <p:sp>
         <p:nvSpPr>
-          <p:cNvPr id="16" name="TextBox 15"/>
+          <p:cNvPr id="53" name="TextBox 52"/>
           <p:cNvSpPr txBox="1"/>
           <p:nvPr/>
         </p:nvSpPr>
@@ -9645,7 +11076,7 @@
       </p:sp>
       <p:sp>
         <p:nvSpPr>
-          <p:cNvPr id="17" name="TextBox 16"/>
+          <p:cNvPr id="54" name="TextBox 53"/>
           <p:cNvSpPr txBox="1"/>
           <p:nvPr/>
         </p:nvSpPr>
@@ -9680,7 +11111,7 @@
       </p:sp>
       <p:sp>
         <p:nvSpPr>
-          <p:cNvPr id="18" name="TextBox 17"/>
+          <p:cNvPr id="55" name="TextBox 54"/>
           <p:cNvSpPr txBox="1"/>
           <p:nvPr/>
         </p:nvSpPr>
@@ -9715,7 +11146,7 @@
       </p:sp>
       <p:sp>
         <p:nvSpPr>
-          <p:cNvPr id="19" name="TextBox 18"/>
+          <p:cNvPr id="56" name="TextBox 55"/>
           <p:cNvSpPr txBox="1"/>
           <p:nvPr/>
         </p:nvSpPr>
@@ -9750,7 +11181,7 @@
       </p:sp>
       <p:sp>
         <p:nvSpPr>
-          <p:cNvPr id="20" name="TextBox 19"/>
+          <p:cNvPr id="57" name="TextBox 56"/>
           <p:cNvSpPr txBox="1"/>
           <p:nvPr/>
         </p:nvSpPr>
@@ -9785,7 +11216,7 @@
       </p:sp>
       <p:sp>
         <p:nvSpPr>
-          <p:cNvPr id="21" name="TextBox 20"/>
+          <p:cNvPr id="58" name="TextBox 57"/>
           <p:cNvSpPr txBox="1"/>
           <p:nvPr/>
         </p:nvSpPr>
@@ -9820,7 +11251,7 @@
       </p:sp>
       <p:sp>
         <p:nvSpPr>
-          <p:cNvPr id="22" name="Rectangle 21"/>
+          <p:cNvPr id="59" name="Rectangle 58"/>
           <p:cNvSpPr/>
           <p:nvPr/>
         </p:nvSpPr>
@@ -9864,7 +11295,217 @@
       </p:sp>
       <p:sp>
         <p:nvSpPr>
-          <p:cNvPr id="23" name="Rectangle 22"/>
+          <p:cNvPr id="60" name="TextBox 59"/>
+          <p:cNvSpPr txBox="1"/>
+          <p:nvPr/>
+        </p:nvSpPr>
+        <p:spPr>
+          <a:xfrm>
+            <a:off x="411480" y="5093208"/>
+            <a:ext cx="1874520" cy="256032"/>
+          </a:xfrm>
+          <a:prstGeom prst="rect">
+            <a:avLst/>
+          </a:prstGeom>
+          <a:noFill/>
+        </p:spPr>
+        <p:txBody>
+          <a:bodyPr wrap="square" lIns="0" rIns="0" tIns="0" bIns="0" anchor="t">
+            <a:spAutoFit/>
+          </a:bodyPr>
+          <a:lstStyle/>
+          <a:p>
+            <a:pPr algn="l"/>
+            <a:r>
+              <a:rPr sz="1000" b="0">
+                <a:solidFill>
+                  <a:srgbClr val="1A1A1A"/>
+                </a:solidFill>
+                <a:latin typeface="Calibri"/>
+              </a:rPr>
+              <a:t>iShares MSCI UAE ETF</a:t>
+            </a:r>
+          </a:p>
+        </p:txBody>
+      </p:sp>
+      <p:sp>
+        <p:nvSpPr>
+          <p:cNvPr id="61" name="TextBox 60"/>
+          <p:cNvSpPr txBox="1"/>
+          <p:nvPr/>
+        </p:nvSpPr>
+        <p:spPr>
+          <a:xfrm>
+            <a:off x="2331720" y="5093208"/>
+            <a:ext cx="960120" cy="256032"/>
+          </a:xfrm>
+          <a:prstGeom prst="rect">
+            <a:avLst/>
+          </a:prstGeom>
+          <a:noFill/>
+        </p:spPr>
+        <p:txBody>
+          <a:bodyPr wrap="square" lIns="0" rIns="0" tIns="0" bIns="0" anchor="t">
+            <a:spAutoFit/>
+          </a:bodyPr>
+          <a:lstStyle/>
+          <a:p>
+            <a:pPr algn="l"/>
+            <a:r>
+              <a:rPr sz="1000" b="0">
+                <a:solidFill>
+                  <a:srgbClr val="1A1A1A"/>
+                </a:solidFill>
+                <a:latin typeface="Calibri"/>
+              </a:rPr>
+              <a:t>UAE</a:t>
+            </a:r>
+          </a:p>
+        </p:txBody>
+      </p:sp>
+      <p:sp>
+        <p:nvSpPr>
+          <p:cNvPr id="62" name="TextBox 61"/>
+          <p:cNvSpPr txBox="1"/>
+          <p:nvPr/>
+        </p:nvSpPr>
+        <p:spPr>
+          <a:xfrm>
+            <a:off x="3337560" y="5093208"/>
+            <a:ext cx="960120" cy="256032"/>
+          </a:xfrm>
+          <a:prstGeom prst="rect">
+            <a:avLst/>
+          </a:prstGeom>
+          <a:noFill/>
+        </p:spPr>
+        <p:txBody>
+          <a:bodyPr wrap="square" lIns="0" rIns="0" tIns="0" bIns="0" anchor="t">
+            <a:spAutoFit/>
+          </a:bodyPr>
+          <a:lstStyle/>
+          <a:p>
+            <a:pPr algn="r"/>
+            <a:r>
+              <a:rPr sz="1000" b="0">
+                <a:solidFill>
+                  <a:srgbClr val="1A1A1A"/>
+                </a:solidFill>
+                <a:latin typeface="Calibri"/>
+              </a:rPr>
+              <a:t>—</a:t>
+            </a:r>
+          </a:p>
+        </p:txBody>
+      </p:sp>
+      <p:sp>
+        <p:nvSpPr>
+          <p:cNvPr id="63" name="TextBox 62"/>
+          <p:cNvSpPr txBox="1"/>
+          <p:nvPr/>
+        </p:nvSpPr>
+        <p:spPr>
+          <a:xfrm>
+            <a:off x="4343400" y="5093208"/>
+            <a:ext cx="594359" cy="256032"/>
+          </a:xfrm>
+          <a:prstGeom prst="rect">
+            <a:avLst/>
+          </a:prstGeom>
+          <a:noFill/>
+        </p:spPr>
+        <p:txBody>
+          <a:bodyPr wrap="square" lIns="0" rIns="0" tIns="0" bIns="0" anchor="t">
+            <a:spAutoFit/>
+          </a:bodyPr>
+          <a:lstStyle/>
+          <a:p>
+            <a:pPr algn="r"/>
+            <a:r>
+              <a:rPr sz="1000" b="0">
+                <a:solidFill>
+                  <a:srgbClr val="1A1A1A"/>
+                </a:solidFill>
+                <a:latin typeface="Calibri"/>
+              </a:rPr>
+              <a:t>—</a:t>
+            </a:r>
+          </a:p>
+        </p:txBody>
+      </p:sp>
+      <p:sp>
+        <p:nvSpPr>
+          <p:cNvPr id="64" name="TextBox 63"/>
+          <p:cNvSpPr txBox="1"/>
+          <p:nvPr/>
+        </p:nvSpPr>
+        <p:spPr>
+          <a:xfrm>
+            <a:off x="4983480" y="5093208"/>
+            <a:ext cx="685800" cy="256032"/>
+          </a:xfrm>
+          <a:prstGeom prst="rect">
+            <a:avLst/>
+          </a:prstGeom>
+          <a:noFill/>
+        </p:spPr>
+        <p:txBody>
+          <a:bodyPr wrap="square" lIns="0" rIns="0" tIns="0" bIns="0" anchor="t">
+            <a:spAutoFit/>
+          </a:bodyPr>
+          <a:lstStyle/>
+          <a:p>
+            <a:pPr algn="r"/>
+            <a:r>
+              <a:rPr sz="1000" b="0">
+                <a:solidFill>
+                  <a:srgbClr val="1A1A1A"/>
+                </a:solidFill>
+                <a:latin typeface="Calibri"/>
+              </a:rPr>
+              <a:t>—</a:t>
+            </a:r>
+          </a:p>
+        </p:txBody>
+      </p:sp>
+      <p:sp>
+        <p:nvSpPr>
+          <p:cNvPr id="65" name="TextBox 64"/>
+          <p:cNvSpPr txBox="1"/>
+          <p:nvPr/>
+        </p:nvSpPr>
+        <p:spPr>
+          <a:xfrm>
+            <a:off x="5715000" y="5093208"/>
+            <a:ext cx="685800" cy="256032"/>
+          </a:xfrm>
+          <a:prstGeom prst="rect">
+            <a:avLst/>
+          </a:prstGeom>
+          <a:noFill/>
+        </p:spPr>
+        <p:txBody>
+          <a:bodyPr wrap="square" lIns="0" rIns="0" tIns="0" bIns="0" anchor="t">
+            <a:spAutoFit/>
+          </a:bodyPr>
+          <a:lstStyle/>
+          <a:p>
+            <a:pPr algn="r"/>
+            <a:r>
+              <a:rPr sz="1000" b="0">
+                <a:solidFill>
+                  <a:srgbClr val="1A1A1A"/>
+                </a:solidFill>
+                <a:latin typeface="Calibri"/>
+              </a:rPr>
+              <a:t>—</a:t>
+            </a:r>
+          </a:p>
+        </p:txBody>
+      </p:sp>
+      <p:sp>
+        <p:nvSpPr>
+          <p:cNvPr id="66" name="Rectangle 65"/>
           <p:cNvSpPr/>
           <p:nvPr/>
         </p:nvSpPr>
@@ -9908,7 +11549,7 @@
       </p:sp>
       <p:sp>
         <p:nvSpPr>
-          <p:cNvPr id="24" name="TextBox 23"/>
+          <p:cNvPr id="67" name="TextBox 66"/>
           <p:cNvSpPr txBox="1"/>
           <p:nvPr/>
         </p:nvSpPr>
@@ -9943,7 +11584,7 @@
       </p:sp>
       <p:sp>
         <p:nvSpPr>
-          <p:cNvPr id="25" name="Rectangle 24"/>
+          <p:cNvPr id="68" name="Rectangle 67"/>
           <p:cNvSpPr/>
           <p:nvPr/>
         </p:nvSpPr>
@@ -9989,7 +11630,7 @@
       </p:sp>
       <p:sp>
         <p:nvSpPr>
-          <p:cNvPr id="26" name="Rectangle 25"/>
+          <p:cNvPr id="69" name="Rectangle 68"/>
           <p:cNvSpPr/>
           <p:nvPr/>
         </p:nvSpPr>
@@ -10033,7 +11674,7 @@
       </p:sp>
       <p:sp>
         <p:nvSpPr>
-          <p:cNvPr id="27" name="TextBox 26"/>
+          <p:cNvPr id="70" name="TextBox 69"/>
           <p:cNvSpPr txBox="1"/>
           <p:nvPr/>
         </p:nvSpPr>
@@ -10068,7 +11709,7 @@
       </p:sp>
       <p:sp>
         <p:nvSpPr>
-          <p:cNvPr id="28" name="Rectangle 27"/>
+          <p:cNvPr id="71" name="Rectangle 70"/>
           <p:cNvSpPr/>
           <p:nvPr/>
         </p:nvSpPr>
@@ -10111,7 +11752,7 @@
       </p:sp>
       <p:sp>
         <p:nvSpPr>
-          <p:cNvPr id="29" name="Rectangle 28"/>
+          <p:cNvPr id="72" name="Rectangle 71"/>
           <p:cNvSpPr/>
           <p:nvPr/>
         </p:nvSpPr>
@@ -10154,7 +11795,7 @@
       </p:sp>
       <p:sp>
         <p:nvSpPr>
-          <p:cNvPr id="30" name="TextBox 29"/>
+          <p:cNvPr id="73" name="TextBox 72"/>
           <p:cNvSpPr txBox="1"/>
           <p:nvPr/>
         </p:nvSpPr>
@@ -10189,7 +11830,7 @@
       </p:sp>
       <p:sp>
         <p:nvSpPr>
-          <p:cNvPr id="31" name="TextBox 30"/>
+          <p:cNvPr id="74" name="TextBox 73"/>
           <p:cNvSpPr txBox="1"/>
           <p:nvPr/>
         </p:nvSpPr>
@@ -10224,7 +11865,7 @@
       </p:sp>
       <p:sp>
         <p:nvSpPr>
-          <p:cNvPr id="32" name="Rectangle 31"/>
+          <p:cNvPr id="75" name="Rectangle 74"/>
           <p:cNvSpPr/>
           <p:nvPr/>
         </p:nvSpPr>
@@ -10270,7 +11911,7 @@
       </p:sp>
       <p:sp>
         <p:nvSpPr>
-          <p:cNvPr id="33" name="Rectangle 32"/>
+          <p:cNvPr id="76" name="Rectangle 75"/>
           <p:cNvSpPr/>
           <p:nvPr/>
         </p:nvSpPr>
@@ -10314,7 +11955,7 @@
       </p:sp>
       <p:sp>
         <p:nvSpPr>
-          <p:cNvPr id="34" name="TextBox 33"/>
+          <p:cNvPr id="77" name="TextBox 76"/>
           <p:cNvSpPr txBox="1"/>
           <p:nvPr/>
         </p:nvSpPr>
@@ -10349,7 +11990,7 @@
       </p:sp>
       <p:sp>
         <p:nvSpPr>
-          <p:cNvPr id="35" name="TextBox 34"/>
+          <p:cNvPr id="78" name="TextBox 77"/>
           <p:cNvSpPr txBox="1"/>
           <p:nvPr/>
         </p:nvSpPr>
@@ -10377,14 +12018,14 @@
                 </a:solidFill>
                 <a:latin typeface="Calibri"/>
               </a:rPr>
-              <a:t> 6.47</a:t>
-            </a:r>
-          </a:p>
-        </p:txBody>
-      </p:sp>
-      <p:sp>
-        <p:nvSpPr>
-          <p:cNvPr id="36" name="TextBox 35"/>
+              <a:t>USD 6.47</a:t>
+            </a:r>
+          </a:p>
+        </p:txBody>
+      </p:sp>
+      <p:sp>
+        <p:nvSpPr>
+          <p:cNvPr id="79" name="TextBox 78"/>
           <p:cNvSpPr txBox="1"/>
           <p:nvPr/>
         </p:nvSpPr>
@@ -10412,14 +12053,49 @@
                 </a:solidFill>
                 <a:latin typeface="Calibri"/>
               </a:rPr>
-              <a:t>Range   6 — 7</a:t>
-            </a:r>
-          </a:p>
-        </p:txBody>
-      </p:sp>
-      <p:sp>
-        <p:nvSpPr>
-          <p:cNvPr id="37" name="Rectangle 36"/>
+              <a:t>Range  USD 6 — 7</a:t>
+            </a:r>
+          </a:p>
+        </p:txBody>
+      </p:sp>
+      <p:sp>
+        <p:nvSpPr>
+          <p:cNvPr id="80" name="TextBox 79"/>
+          <p:cNvSpPr txBox="1"/>
+          <p:nvPr/>
+        </p:nvSpPr>
+        <p:spPr>
+          <a:xfrm>
+            <a:off x="2593848" y="8750808"/>
+            <a:ext cx="1706879" cy="164592"/>
+          </a:xfrm>
+          <a:prstGeom prst="rect">
+            <a:avLst/>
+          </a:prstGeom>
+          <a:noFill/>
+        </p:spPr>
+        <p:txBody>
+          <a:bodyPr wrap="square" lIns="0" rIns="0" tIns="0" bIns="0" anchor="t">
+            <a:spAutoFit/>
+          </a:bodyPr>
+          <a:lstStyle/>
+          <a:p>
+            <a:pPr algn="l"/>
+            <a:r>
+              <a:rPr sz="900" b="0">
+                <a:solidFill>
+                  <a:srgbClr val="2F7D4F"/>
+                </a:solidFill>
+                <a:latin typeface="Calibri"/>
+              </a:rPr>
+              <a:t>Implied +286.5% vs last close</a:t>
+            </a:r>
+          </a:p>
+        </p:txBody>
+      </p:sp>
+      <p:sp>
+        <p:nvSpPr>
+          <p:cNvPr id="81" name="Rectangle 80"/>
           <p:cNvSpPr/>
           <p:nvPr/>
         </p:nvSpPr>
@@ -10465,7 +12141,7 @@
       </p:sp>
       <p:sp>
         <p:nvSpPr>
-          <p:cNvPr id="38" name="Rectangle 37"/>
+          <p:cNvPr id="82" name="Rectangle 81"/>
           <p:cNvSpPr/>
           <p:nvPr/>
         </p:nvSpPr>
@@ -10509,7 +12185,7 @@
       </p:sp>
       <p:sp>
         <p:nvSpPr>
-          <p:cNvPr id="39" name="TextBox 38"/>
+          <p:cNvPr id="83" name="TextBox 82"/>
           <p:cNvSpPr txBox="1"/>
           <p:nvPr/>
         </p:nvSpPr>
@@ -10544,14 +12220,14 @@
       </p:sp>
       <p:sp>
         <p:nvSpPr>
-          <p:cNvPr id="40" name="TextBox 39"/>
-          <p:cNvSpPr txBox="1"/>
-          <p:nvPr/>
-        </p:nvSpPr>
-        <p:spPr>
-          <a:xfrm>
-            <a:off x="4666488" y="8275320"/>
-            <a:ext cx="1706879" cy="182880"/>
+          <p:cNvPr id="84" name="TextBox 83"/>
+          <p:cNvSpPr txBox="1"/>
+          <p:nvPr/>
+        </p:nvSpPr>
+        <p:spPr>
+          <a:xfrm>
+            <a:off x="4666488" y="8220456"/>
+            <a:ext cx="502920" cy="182880"/>
           </a:xfrm>
           <a:prstGeom prst="rect">
             <a:avLst/>
@@ -10566,20 +12242,195 @@
           <a:p>
             <a:pPr algn="l"/>
             <a:r>
-              <a:rPr sz="900" b="0">
-                <a:solidFill>
-                  <a:srgbClr val="9A9A9A"/>
-                </a:solidFill>
-                <a:latin typeface="Calibri"/>
-              </a:rPr>
-              <a:t>No broker actions in feed</a:t>
-            </a:r>
-          </a:p>
-        </p:txBody>
-      </p:sp>
-      <p:sp>
-        <p:nvSpPr>
-          <p:cNvPr id="41" name="Rectangle 40"/>
+              <a:rPr sz="1000" b="0">
+                <a:solidFill>
+                  <a:srgbClr val="5C5C5C"/>
+                </a:solidFill>
+                <a:latin typeface="Calibri"/>
+              </a:rPr>
+              <a:t>May. 12</a:t>
+            </a:r>
+          </a:p>
+        </p:txBody>
+      </p:sp>
+      <p:sp>
+        <p:nvSpPr>
+          <p:cNvPr id="85" name="TextBox 84"/>
+          <p:cNvSpPr txBox="1"/>
+          <p:nvPr/>
+        </p:nvSpPr>
+        <p:spPr>
+          <a:xfrm>
+            <a:off x="5196840" y="8220456"/>
+            <a:ext cx="1176527" cy="182880"/>
+          </a:xfrm>
+          <a:prstGeom prst="rect">
+            <a:avLst/>
+          </a:prstGeom>
+          <a:noFill/>
+        </p:spPr>
+        <p:txBody>
+          <a:bodyPr wrap="square" lIns="0" rIns="0" tIns="0" bIns="0" anchor="t">
+            <a:spAutoFit/>
+          </a:bodyPr>
+          <a:lstStyle/>
+          <a:p>
+            <a:pPr algn="l"/>
+            <a:r>
+              <a:rPr sz="1000" b="0">
+                <a:solidFill>
+                  <a:srgbClr val="1A1A1A"/>
+                </a:solidFill>
+                <a:latin typeface="Calibri"/>
+              </a:rPr>
+              <a:t>BofA Upbeat on Adnoc Drilling Amid Potential Oil Production Boost in UAE; Price Objective Nudged Higher</a:t>
+            </a:r>
+          </a:p>
+        </p:txBody>
+      </p:sp>
+      <p:sp>
+        <p:nvSpPr>
+          <p:cNvPr id="86" name="TextBox 85"/>
+          <p:cNvSpPr txBox="1"/>
+          <p:nvPr/>
+        </p:nvSpPr>
+        <p:spPr>
+          <a:xfrm>
+            <a:off x="4666488" y="8458200"/>
+            <a:ext cx="502920" cy="182880"/>
+          </a:xfrm>
+          <a:prstGeom prst="rect">
+            <a:avLst/>
+          </a:prstGeom>
+          <a:noFill/>
+        </p:spPr>
+        <p:txBody>
+          <a:bodyPr wrap="square" lIns="0" rIns="0" tIns="0" bIns="0" anchor="t">
+            <a:spAutoFit/>
+          </a:bodyPr>
+          <a:lstStyle/>
+          <a:p>
+            <a:pPr algn="l"/>
+            <a:r>
+              <a:rPr sz="1000" b="0">
+                <a:solidFill>
+                  <a:srgbClr val="5C5C5C"/>
+                </a:solidFill>
+                <a:latin typeface="Calibri"/>
+              </a:rPr>
+              <a:t>Feb. 18</a:t>
+            </a:r>
+          </a:p>
+        </p:txBody>
+      </p:sp>
+      <p:sp>
+        <p:nvSpPr>
+          <p:cNvPr id="87" name="TextBox 86"/>
+          <p:cNvSpPr txBox="1"/>
+          <p:nvPr/>
+        </p:nvSpPr>
+        <p:spPr>
+          <a:xfrm>
+            <a:off x="5196840" y="8458200"/>
+            <a:ext cx="1176527" cy="182880"/>
+          </a:xfrm>
+          <a:prstGeom prst="rect">
+            <a:avLst/>
+          </a:prstGeom>
+          <a:noFill/>
+        </p:spPr>
+        <p:txBody>
+          <a:bodyPr wrap="square" lIns="0" rIns="0" tIns="0" bIns="0" anchor="t">
+            <a:spAutoFit/>
+          </a:bodyPr>
+          <a:lstStyle/>
+          <a:p>
+            <a:pPr algn="l"/>
+            <a:r>
+              <a:rPr sz="1000" b="0">
+                <a:solidFill>
+                  <a:srgbClr val="1A1A1A"/>
+                </a:solidFill>
+                <a:latin typeface="Calibri"/>
+              </a:rPr>
+              <a:t>FAB Securities Affirms Adnoc Drilling's Buy Rating on Solid Q4 2025 Performance</a:t>
+            </a:r>
+          </a:p>
+        </p:txBody>
+      </p:sp>
+      <p:sp>
+        <p:nvSpPr>
+          <p:cNvPr id="88" name="TextBox 87"/>
+          <p:cNvSpPr txBox="1"/>
+          <p:nvPr/>
+        </p:nvSpPr>
+        <p:spPr>
+          <a:xfrm>
+            <a:off x="4666488" y="8695944"/>
+            <a:ext cx="502920" cy="182880"/>
+          </a:xfrm>
+          <a:prstGeom prst="rect">
+            <a:avLst/>
+          </a:prstGeom>
+          <a:noFill/>
+        </p:spPr>
+        <p:txBody>
+          <a:bodyPr wrap="square" lIns="0" rIns="0" tIns="0" bIns="0" anchor="t">
+            <a:spAutoFit/>
+          </a:bodyPr>
+          <a:lstStyle/>
+          <a:p>
+            <a:pPr algn="l"/>
+            <a:r>
+              <a:rPr sz="1000" b="0">
+                <a:solidFill>
+                  <a:srgbClr val="5C5C5C"/>
+                </a:solidFill>
+                <a:latin typeface="Calibri"/>
+              </a:rPr>
+              <a:t>25-04-14</a:t>
+            </a:r>
+          </a:p>
+        </p:txBody>
+      </p:sp>
+      <p:sp>
+        <p:nvSpPr>
+          <p:cNvPr id="89" name="TextBox 88"/>
+          <p:cNvSpPr txBox="1"/>
+          <p:nvPr/>
+        </p:nvSpPr>
+        <p:spPr>
+          <a:xfrm>
+            <a:off x="5196840" y="8695944"/>
+            <a:ext cx="1176527" cy="182880"/>
+          </a:xfrm>
+          <a:prstGeom prst="rect">
+            <a:avLst/>
+          </a:prstGeom>
+          <a:noFill/>
+        </p:spPr>
+        <p:txBody>
+          <a:bodyPr wrap="square" lIns="0" rIns="0" tIns="0" bIns="0" anchor="t">
+            <a:spAutoFit/>
+          </a:bodyPr>
+          <a:lstStyle/>
+          <a:p>
+            <a:pPr algn="l"/>
+            <a:r>
+              <a:rPr sz="1000" b="0">
+                <a:solidFill>
+                  <a:srgbClr val="1A1A1A"/>
+                </a:solidFill>
+                <a:latin typeface="Calibri"/>
+              </a:rPr>
+              <a:t>Adnoc Drilling to Dodge 'Significant' Impact of Macro Challenges, HSBC Says</a:t>
+            </a:r>
+          </a:p>
+        </p:txBody>
+      </p:sp>
+      <p:sp>
+        <p:nvSpPr>
+          <p:cNvPr id="90" name="Rectangle 89"/>
           <p:cNvSpPr/>
           <p:nvPr/>
         </p:nvSpPr>
@@ -10623,7 +12474,7 @@
       </p:sp>
       <p:sp>
         <p:nvSpPr>
-          <p:cNvPr id="42" name="TextBox 41"/>
+          <p:cNvPr id="91" name="TextBox 90"/>
           <p:cNvSpPr txBox="1"/>
           <p:nvPr/>
         </p:nvSpPr>
@@ -10651,14 +12502,14 @@
                 </a:solidFill>
                 <a:latin typeface="Calibri"/>
               </a:rPr>
-              <a:t>Source: investing  |  Generated 13 May 2026  |  Analyst: Jabal Research</a:t>
-            </a:r>
-          </a:p>
-        </p:txBody>
-      </p:sp>
-      <p:sp>
-        <p:nvSpPr>
-          <p:cNvPr id="43" name="TextBox 42"/>
+              <a:t>Source: investing, ishares, marketscreener  |  Generated 13 May 2026  |  Analyst: Jabal Research</a:t>
+            </a:r>
+          </a:p>
+        </p:txBody>
+      </p:sp>
+      <p:sp>
+        <p:nvSpPr>
+          <p:cNvPr id="92" name="TextBox 91"/>
           <p:cNvSpPr txBox="1"/>
           <p:nvPr/>
         </p:nvSpPr>
@@ -10693,7 +12544,7 @@
       </p:sp>
       <p:sp>
         <p:nvSpPr>
-          <p:cNvPr id="44" name="TextBox 43"/>
+          <p:cNvPr id="93" name="TextBox 92"/>
           <p:cNvSpPr txBox="1"/>
           <p:nvPr/>
         </p:nvSpPr>
@@ -10728,7 +12579,7 @@
       </p:sp>
       <p:sp>
         <p:nvSpPr>
-          <p:cNvPr id="45" name="TextBox 44"/>
+          <p:cNvPr id="94" name="TextBox 93"/>
           <p:cNvSpPr txBox="1"/>
           <p:nvPr/>
         </p:nvSpPr>

--- a/static/decks/ADNOCDRILL.AE.pptx
+++ b/static/decks/ADNOCDRILL.AE.pptx
@@ -11393,7 +11393,7 @@
                 </a:solidFill>
                 <a:latin typeface="Calibri"/>
               </a:rPr>
-              <a:t>—</a:t>
+              <a:t>$272M</a:t>
             </a:r>
           </a:p>
         </p:txBody>
@@ -11463,7 +11463,7 @@
                 </a:solidFill>
                 <a:latin typeface="Calibri"/>
               </a:rPr>
-              <a:t>—</a:t>
+              <a:t>+21.6% YTD</a:t>
             </a:r>
           </a:p>
         </p:txBody>
@@ -11494,11 +11494,11 @@
             <a:r>
               <a:rPr sz="1000" b="0">
                 <a:solidFill>
-                  <a:srgbClr val="1A1A1A"/>
-                </a:solidFill>
-                <a:latin typeface="Calibri"/>
-              </a:rPr>
-              <a:t>—</a:t>
+                  <a:srgbClr val="2F7D4F"/>
+                </a:solidFill>
+                <a:latin typeface="Calibri"/>
+              </a:rPr>
+              <a:t>+12.6%</a:t>
             </a:r>
           </a:p>
         </p:txBody>

--- a/static/decks/ADNOCDRILL.AE.pptx
+++ b/static/decks/ADNOCDRILL.AE.pptx
@@ -6002,7 +6002,7 @@
                 </a:solidFill>
                 <a:latin typeface="Calibri"/>
               </a:rPr>
-              <a:t>Source: investing, ishares, marketscreener  |  Generated 13 May 2026  |  Analyst: Jabal Research</a:t>
+              <a:t>Source: investing, ishares, marketscreener  |  Generated 14 May 2026  |  Analyst: Jabal Research</a:t>
             </a:r>
           </a:p>
         </p:txBody>
@@ -8963,7 +8963,7 @@
                 </a:solidFill>
                 <a:latin typeface="Calibri"/>
               </a:rPr>
-              <a:t>Source: investing, ishares, marketscreener  |  Generated 13 May 2026  |  Analyst: Jabal Research</a:t>
+              <a:t>Source: investing, ishares, marketscreener  |  Generated 14 May 2026  |  Analyst: Jabal Research</a:t>
             </a:r>
           </a:p>
         </p:txBody>
@@ -12502,7 +12502,7 @@
                 </a:solidFill>
                 <a:latin typeface="Calibri"/>
               </a:rPr>
-              <a:t>Source: investing, ishares, marketscreener  |  Generated 13 May 2026  |  Analyst: Jabal Research</a:t>
+              <a:t>Source: investing, ishares, marketscreener  |  Generated 14 May 2026  |  Analyst: Jabal Research</a:t>
             </a:r>
           </a:p>
         </p:txBody>
